--- a/mario/mario.pptx
+++ b/mario/mario.pptx
@@ -8,6 +8,8 @@
     <p:sldId id="256" r:id="rId2"/>
     <p:sldId id="257" r:id="rId3"/>
     <p:sldId id="258" r:id="rId4"/>
+    <p:sldId id="259" r:id="rId5"/>
+    <p:sldId id="260" r:id="rId6"/>
   </p:sldIdLst>
   <p:sldSz cx="12192000" cy="6858000"/>
   <p:notesSz cx="6858000" cy="9144000"/>
@@ -106,6 +108,11 @@
       </a:defRPr>
     </a:lvl9pPr>
   </p:defaultTextStyle>
+  <p:extLst>
+    <p:ext uri="{EFAFB233-063F-42B5-8137-9DF3F51BA10A}">
+      <p15:sldGuideLst xmlns:p15="http://schemas.microsoft.com/office/powerpoint/2012/main"/>
+    </p:ext>
+  </p:extLst>
 </p:presentation>
 </file>
 
@@ -256,7 +263,7 @@
           <a:p>
             <a:fld id="{24D1FB6B-3C64-4C00-B0AE-7E00DB546FF3}" type="datetimeFigureOut">
               <a:rPr kumimoji="1" lang="ja-JP" altLang="en-US" smtClean="0"/>
-              <a:t>2025/7/23</a:t>
+              <a:t>2025/8/4</a:t>
             </a:fld>
             <a:endParaRPr kumimoji="1" lang="ja-JP" altLang="en-US"/>
           </a:p>
@@ -486,7 +493,7 @@
           <a:p>
             <a:fld id="{24D1FB6B-3C64-4C00-B0AE-7E00DB546FF3}" type="datetimeFigureOut">
               <a:rPr kumimoji="1" lang="ja-JP" altLang="en-US" smtClean="0"/>
-              <a:t>2025/7/23</a:t>
+              <a:t>2025/8/4</a:t>
             </a:fld>
             <a:endParaRPr kumimoji="1" lang="ja-JP" altLang="en-US"/>
           </a:p>
@@ -726,7 +733,7 @@
           <a:p>
             <a:fld id="{24D1FB6B-3C64-4C00-B0AE-7E00DB546FF3}" type="datetimeFigureOut">
               <a:rPr kumimoji="1" lang="ja-JP" altLang="en-US" smtClean="0"/>
-              <a:t>2025/7/23</a:t>
+              <a:t>2025/8/4</a:t>
             </a:fld>
             <a:endParaRPr kumimoji="1" lang="ja-JP" altLang="en-US"/>
           </a:p>
@@ -956,7 +963,7 @@
           <a:p>
             <a:fld id="{24D1FB6B-3C64-4C00-B0AE-7E00DB546FF3}" type="datetimeFigureOut">
               <a:rPr kumimoji="1" lang="ja-JP" altLang="en-US" smtClean="0"/>
-              <a:t>2025/7/23</a:t>
+              <a:t>2025/8/4</a:t>
             </a:fld>
             <a:endParaRPr kumimoji="1" lang="ja-JP" altLang="en-US"/>
           </a:p>
@@ -1231,7 +1238,7 @@
           <a:p>
             <a:fld id="{24D1FB6B-3C64-4C00-B0AE-7E00DB546FF3}" type="datetimeFigureOut">
               <a:rPr kumimoji="1" lang="ja-JP" altLang="en-US" smtClean="0"/>
-              <a:t>2025/7/23</a:t>
+              <a:t>2025/8/4</a:t>
             </a:fld>
             <a:endParaRPr kumimoji="1" lang="ja-JP" altLang="en-US"/>
           </a:p>
@@ -1560,7 +1567,7 @@
           <a:p>
             <a:fld id="{24D1FB6B-3C64-4C00-B0AE-7E00DB546FF3}" type="datetimeFigureOut">
               <a:rPr kumimoji="1" lang="ja-JP" altLang="en-US" smtClean="0"/>
-              <a:t>2025/7/23</a:t>
+              <a:t>2025/8/4</a:t>
             </a:fld>
             <a:endParaRPr kumimoji="1" lang="ja-JP" altLang="en-US"/>
           </a:p>
@@ -2036,7 +2043,7 @@
           <a:p>
             <a:fld id="{24D1FB6B-3C64-4C00-B0AE-7E00DB546FF3}" type="datetimeFigureOut">
               <a:rPr kumimoji="1" lang="ja-JP" altLang="en-US" smtClean="0"/>
-              <a:t>2025/7/23</a:t>
+              <a:t>2025/8/4</a:t>
             </a:fld>
             <a:endParaRPr kumimoji="1" lang="ja-JP" altLang="en-US"/>
           </a:p>
@@ -2177,7 +2184,7 @@
           <a:p>
             <a:fld id="{24D1FB6B-3C64-4C00-B0AE-7E00DB546FF3}" type="datetimeFigureOut">
               <a:rPr kumimoji="1" lang="ja-JP" altLang="en-US" smtClean="0"/>
-              <a:t>2025/7/23</a:t>
+              <a:t>2025/8/4</a:t>
             </a:fld>
             <a:endParaRPr kumimoji="1" lang="ja-JP" altLang="en-US"/>
           </a:p>
@@ -2290,7 +2297,7 @@
           <a:p>
             <a:fld id="{24D1FB6B-3C64-4C00-B0AE-7E00DB546FF3}" type="datetimeFigureOut">
               <a:rPr kumimoji="1" lang="ja-JP" altLang="en-US" smtClean="0"/>
-              <a:t>2025/7/23</a:t>
+              <a:t>2025/8/4</a:t>
             </a:fld>
             <a:endParaRPr kumimoji="1" lang="ja-JP" altLang="en-US"/>
           </a:p>
@@ -2633,7 +2640,7 @@
           <a:p>
             <a:fld id="{24D1FB6B-3C64-4C00-B0AE-7E00DB546FF3}" type="datetimeFigureOut">
               <a:rPr kumimoji="1" lang="ja-JP" altLang="en-US" smtClean="0"/>
-              <a:t>2025/7/23</a:t>
+              <a:t>2025/8/4</a:t>
             </a:fld>
             <a:endParaRPr kumimoji="1" lang="ja-JP" altLang="en-US"/>
           </a:p>
@@ -2921,7 +2928,7 @@
           <a:p>
             <a:fld id="{24D1FB6B-3C64-4C00-B0AE-7E00DB546FF3}" type="datetimeFigureOut">
               <a:rPr kumimoji="1" lang="ja-JP" altLang="en-US" smtClean="0"/>
-              <a:t>2025/7/23</a:t>
+              <a:t>2025/8/4</a:t>
             </a:fld>
             <a:endParaRPr kumimoji="1" lang="ja-JP" altLang="en-US"/>
           </a:p>
@@ -3194,7 +3201,7 @@
           <a:p>
             <a:fld id="{24D1FB6B-3C64-4C00-B0AE-7E00DB546FF3}" type="datetimeFigureOut">
               <a:rPr kumimoji="1" lang="ja-JP" altLang="en-US" smtClean="0"/>
-              <a:t>2025/7/23</a:t>
+              <a:t>2025/8/4</a:t>
             </a:fld>
             <a:endParaRPr kumimoji="1" lang="ja-JP" altLang="en-US"/>
           </a:p>
@@ -4695,12 +4702,16 @@
           <a:lstStyle/>
           <a:p>
             <a:r>
-              <a:rPr kumimoji="1" lang="ja-JP" altLang="en-US" sz="4400" dirty="0">
+              <a:rPr lang="ja-JP" altLang="en-US" sz="4400" dirty="0">
                 <a:latin typeface="HGP行書体" panose="03000600000000000000" pitchFamily="66" charset="-128"/>
                 <a:ea typeface="HGP行書体" panose="03000600000000000000" pitchFamily="66" charset="-128"/>
               </a:rPr>
-              <a:t>仕様</a:t>
-            </a:r>
+              <a:t>操作</a:t>
+            </a:r>
+            <a:endParaRPr kumimoji="1" lang="ja-JP" altLang="en-US" sz="4400" dirty="0">
+              <a:latin typeface="HGP行書体" panose="03000600000000000000" pitchFamily="66" charset="-128"/>
+              <a:ea typeface="HGP行書体" panose="03000600000000000000" pitchFamily="66" charset="-128"/>
+            </a:endParaRPr>
           </a:p>
         </p:txBody>
       </p:sp>
@@ -5114,7 +5125,7 @@
         <p:spPr>
           <a:xfrm>
             <a:off x="5597607" y="1188951"/>
-            <a:ext cx="4801314" cy="708977"/>
+            <a:ext cx="5314275" cy="708977"/>
           </a:xfrm>
           <a:prstGeom prst="rect">
             <a:avLst/>
@@ -5129,7 +5140,7 @@
           <a:p>
             <a:r>
               <a:rPr lang="ja-JP" altLang="en-US" sz="4000" b="1" dirty="0"/>
-              <a:t>左右のボタンで移動</a:t>
+              <a:t>左右の十字キーで移動</a:t>
             </a:r>
             <a:endParaRPr lang="en-US" altLang="ja-JP" sz="4000" b="1" dirty="0"/>
           </a:p>
@@ -5213,6 +5224,496 @@
               <a:rPr kumimoji="1" lang="ja-JP" altLang="en-US" sz="4000" b="1" dirty="0"/>
               <a:t>で攻撃</a:t>
             </a:r>
+          </a:p>
+        </p:txBody>
+      </p:sp>
+      <p:sp>
+        <p:nvSpPr>
+          <p:cNvPr id="2" name="正方形/長方形 1">
+            <a:extLst>
+              <a:ext uri="{FF2B5EF4-FFF2-40B4-BE49-F238E27FC236}">
+                <a16:creationId xmlns:a16="http://schemas.microsoft.com/office/drawing/2014/main" id="{571D1183-4CB8-56C2-315B-1DDB91C071F9}"/>
+              </a:ext>
+            </a:extLst>
+          </p:cNvPr>
+          <p:cNvSpPr/>
+          <p:nvPr/>
+        </p:nvSpPr>
+        <p:spPr>
+          <a:xfrm>
+            <a:off x="10605144" y="5570443"/>
+            <a:ext cx="580130" cy="517793"/>
+          </a:xfrm>
+          <a:prstGeom prst="rect">
+            <a:avLst/>
+          </a:prstGeom>
+          <a:solidFill>
+            <a:srgbClr val="CA8F0C"/>
+          </a:solidFill>
+        </p:spPr>
+        <p:style>
+          <a:lnRef idx="2">
+            <a:schemeClr val="accent1">
+              <a:shade val="15000"/>
+            </a:schemeClr>
+          </a:lnRef>
+          <a:fillRef idx="1">
+            <a:schemeClr val="accent1"/>
+          </a:fillRef>
+          <a:effectRef idx="0">
+            <a:schemeClr val="accent1"/>
+          </a:effectRef>
+          <a:fontRef idx="minor">
+            <a:schemeClr val="lt1"/>
+          </a:fontRef>
+        </p:style>
+        <p:txBody>
+          <a:bodyPr rtlCol="0" anchor="ctr"/>
+          <a:lstStyle/>
+          <a:p>
+            <a:pPr algn="ctr"/>
+            <a:endParaRPr kumimoji="1" lang="ja-JP" altLang="en-US"/>
+          </a:p>
+        </p:txBody>
+      </p:sp>
+      <p:sp>
+        <p:nvSpPr>
+          <p:cNvPr id="17" name="正方形/長方形 16">
+            <a:extLst>
+              <a:ext uri="{FF2B5EF4-FFF2-40B4-BE49-F238E27FC236}">
+                <a16:creationId xmlns:a16="http://schemas.microsoft.com/office/drawing/2014/main" id="{178E2249-2BA4-54ED-D1BD-FB952CDA478D}"/>
+              </a:ext>
+            </a:extLst>
+          </p:cNvPr>
+          <p:cNvSpPr/>
+          <p:nvPr/>
+        </p:nvSpPr>
+        <p:spPr>
+          <a:xfrm>
+            <a:off x="11185274" y="5563197"/>
+            <a:ext cx="580130" cy="517793"/>
+          </a:xfrm>
+          <a:prstGeom prst="rect">
+            <a:avLst/>
+          </a:prstGeom>
+          <a:solidFill>
+            <a:srgbClr val="CA8F0C"/>
+          </a:solidFill>
+        </p:spPr>
+        <p:style>
+          <a:lnRef idx="2">
+            <a:schemeClr val="accent1">
+              <a:shade val="15000"/>
+            </a:schemeClr>
+          </a:lnRef>
+          <a:fillRef idx="1">
+            <a:schemeClr val="accent1"/>
+          </a:fillRef>
+          <a:effectRef idx="0">
+            <a:schemeClr val="accent1"/>
+          </a:effectRef>
+          <a:fontRef idx="minor">
+            <a:schemeClr val="lt1"/>
+          </a:fontRef>
+        </p:style>
+        <p:txBody>
+          <a:bodyPr rtlCol="0" anchor="ctr"/>
+          <a:lstStyle/>
+          <a:p>
+            <a:pPr algn="ctr"/>
+            <a:endParaRPr kumimoji="1" lang="ja-JP" altLang="en-US"/>
+          </a:p>
+        </p:txBody>
+      </p:sp>
+      <p:sp>
+        <p:nvSpPr>
+          <p:cNvPr id="18" name="正方形/長方形 17">
+            <a:extLst>
+              <a:ext uri="{FF2B5EF4-FFF2-40B4-BE49-F238E27FC236}">
+                <a16:creationId xmlns:a16="http://schemas.microsoft.com/office/drawing/2014/main" id="{4F049A2F-1807-D0B1-D881-51931A2242F6}"/>
+              </a:ext>
+            </a:extLst>
+          </p:cNvPr>
+          <p:cNvSpPr/>
+          <p:nvPr/>
+        </p:nvSpPr>
+        <p:spPr>
+          <a:xfrm>
+            <a:off x="11186798" y="5034550"/>
+            <a:ext cx="580130" cy="517793"/>
+          </a:xfrm>
+          <a:prstGeom prst="rect">
+            <a:avLst/>
+          </a:prstGeom>
+          <a:solidFill>
+            <a:srgbClr val="CA8F0C"/>
+          </a:solidFill>
+        </p:spPr>
+        <p:style>
+          <a:lnRef idx="2">
+            <a:schemeClr val="accent1">
+              <a:shade val="15000"/>
+            </a:schemeClr>
+          </a:lnRef>
+          <a:fillRef idx="1">
+            <a:schemeClr val="accent1"/>
+          </a:fillRef>
+          <a:effectRef idx="0">
+            <a:schemeClr val="accent1"/>
+          </a:effectRef>
+          <a:fontRef idx="minor">
+            <a:schemeClr val="lt1"/>
+          </a:fontRef>
+        </p:style>
+        <p:txBody>
+          <a:bodyPr rtlCol="0" anchor="ctr"/>
+          <a:lstStyle/>
+          <a:p>
+            <a:pPr algn="ctr"/>
+            <a:endParaRPr kumimoji="1" lang="ja-JP" altLang="en-US"/>
+          </a:p>
+        </p:txBody>
+      </p:sp>
+      <p:sp>
+        <p:nvSpPr>
+          <p:cNvPr id="19" name="正方形/長方形 18">
+            <a:extLst>
+              <a:ext uri="{FF2B5EF4-FFF2-40B4-BE49-F238E27FC236}">
+                <a16:creationId xmlns:a16="http://schemas.microsoft.com/office/drawing/2014/main" id="{A00066FF-5240-F1BC-5907-A3B3C8CF1D82}"/>
+              </a:ext>
+            </a:extLst>
+          </p:cNvPr>
+          <p:cNvSpPr/>
+          <p:nvPr/>
+        </p:nvSpPr>
+        <p:spPr>
+          <a:xfrm>
+            <a:off x="11760391" y="5581296"/>
+            <a:ext cx="580130" cy="517793"/>
+          </a:xfrm>
+          <a:prstGeom prst="rect">
+            <a:avLst/>
+          </a:prstGeom>
+          <a:solidFill>
+            <a:srgbClr val="CA8F0C"/>
+          </a:solidFill>
+        </p:spPr>
+        <p:style>
+          <a:lnRef idx="2">
+            <a:schemeClr val="accent1">
+              <a:shade val="15000"/>
+            </a:schemeClr>
+          </a:lnRef>
+          <a:fillRef idx="1">
+            <a:schemeClr val="accent1"/>
+          </a:fillRef>
+          <a:effectRef idx="0">
+            <a:schemeClr val="accent1"/>
+          </a:effectRef>
+          <a:fontRef idx="minor">
+            <a:schemeClr val="lt1"/>
+          </a:fontRef>
+        </p:style>
+        <p:txBody>
+          <a:bodyPr rtlCol="0" anchor="ctr"/>
+          <a:lstStyle/>
+          <a:p>
+            <a:pPr algn="ctr"/>
+            <a:endParaRPr kumimoji="1" lang="ja-JP" altLang="en-US"/>
+          </a:p>
+        </p:txBody>
+      </p:sp>
+      <p:sp>
+        <p:nvSpPr>
+          <p:cNvPr id="20" name="正方形/長方形 19">
+            <a:extLst>
+              <a:ext uri="{FF2B5EF4-FFF2-40B4-BE49-F238E27FC236}">
+                <a16:creationId xmlns:a16="http://schemas.microsoft.com/office/drawing/2014/main" id="{E206CF5A-1E80-4F30-4352-59FA12EEBA33}"/>
+              </a:ext>
+            </a:extLst>
+          </p:cNvPr>
+          <p:cNvSpPr/>
+          <p:nvPr/>
+        </p:nvSpPr>
+        <p:spPr>
+          <a:xfrm>
+            <a:off x="11753736" y="5045357"/>
+            <a:ext cx="580130" cy="517793"/>
+          </a:xfrm>
+          <a:prstGeom prst="rect">
+            <a:avLst/>
+          </a:prstGeom>
+          <a:solidFill>
+            <a:srgbClr val="CA8F0C"/>
+          </a:solidFill>
+        </p:spPr>
+        <p:style>
+          <a:lnRef idx="2">
+            <a:schemeClr val="accent1">
+              <a:shade val="15000"/>
+            </a:schemeClr>
+          </a:lnRef>
+          <a:fillRef idx="1">
+            <a:schemeClr val="accent1"/>
+          </a:fillRef>
+          <a:effectRef idx="0">
+            <a:schemeClr val="accent1"/>
+          </a:effectRef>
+          <a:fontRef idx="minor">
+            <a:schemeClr val="lt1"/>
+          </a:fontRef>
+        </p:style>
+        <p:txBody>
+          <a:bodyPr rtlCol="0" anchor="ctr"/>
+          <a:lstStyle/>
+          <a:p>
+            <a:pPr algn="ctr"/>
+            <a:endParaRPr kumimoji="1" lang="ja-JP" altLang="en-US"/>
+          </a:p>
+        </p:txBody>
+      </p:sp>
+      <p:sp>
+        <p:nvSpPr>
+          <p:cNvPr id="21" name="正方形/長方形 20">
+            <a:extLst>
+              <a:ext uri="{FF2B5EF4-FFF2-40B4-BE49-F238E27FC236}">
+                <a16:creationId xmlns:a16="http://schemas.microsoft.com/office/drawing/2014/main" id="{E3C1CF9B-C5D1-8D64-26BE-953DAB48D906}"/>
+              </a:ext>
+            </a:extLst>
+          </p:cNvPr>
+          <p:cNvSpPr/>
+          <p:nvPr/>
+        </p:nvSpPr>
+        <p:spPr>
+          <a:xfrm>
+            <a:off x="10028503" y="5581296"/>
+            <a:ext cx="580130" cy="517793"/>
+          </a:xfrm>
+          <a:prstGeom prst="rect">
+            <a:avLst/>
+          </a:prstGeom>
+          <a:solidFill>
+            <a:srgbClr val="CA8F0C"/>
+          </a:solidFill>
+        </p:spPr>
+        <p:style>
+          <a:lnRef idx="2">
+            <a:schemeClr val="accent1">
+              <a:shade val="15000"/>
+            </a:schemeClr>
+          </a:lnRef>
+          <a:fillRef idx="1">
+            <a:schemeClr val="accent1"/>
+          </a:fillRef>
+          <a:effectRef idx="0">
+            <a:schemeClr val="accent1"/>
+          </a:effectRef>
+          <a:fontRef idx="minor">
+            <a:schemeClr val="lt1"/>
+          </a:fontRef>
+        </p:style>
+        <p:txBody>
+          <a:bodyPr rtlCol="0" anchor="ctr"/>
+          <a:lstStyle/>
+          <a:p>
+            <a:pPr algn="ctr"/>
+            <a:endParaRPr kumimoji="1" lang="ja-JP" altLang="en-US"/>
+          </a:p>
+        </p:txBody>
+      </p:sp>
+      <p:sp>
+        <p:nvSpPr>
+          <p:cNvPr id="22" name="正方形/長方形 21">
+            <a:extLst>
+              <a:ext uri="{FF2B5EF4-FFF2-40B4-BE49-F238E27FC236}">
+                <a16:creationId xmlns:a16="http://schemas.microsoft.com/office/drawing/2014/main" id="{73760633-AB67-50D1-A54B-9AED3BB1CD71}"/>
+              </a:ext>
+            </a:extLst>
+          </p:cNvPr>
+          <p:cNvSpPr/>
+          <p:nvPr/>
+        </p:nvSpPr>
+        <p:spPr>
+          <a:xfrm>
+            <a:off x="10610157" y="5052650"/>
+            <a:ext cx="580130" cy="517793"/>
+          </a:xfrm>
+          <a:prstGeom prst="rect">
+            <a:avLst/>
+          </a:prstGeom>
+          <a:solidFill>
+            <a:srgbClr val="CA8F0C"/>
+          </a:solidFill>
+        </p:spPr>
+        <p:style>
+          <a:lnRef idx="2">
+            <a:schemeClr val="accent1">
+              <a:shade val="15000"/>
+            </a:schemeClr>
+          </a:lnRef>
+          <a:fillRef idx="1">
+            <a:schemeClr val="accent1"/>
+          </a:fillRef>
+          <a:effectRef idx="0">
+            <a:schemeClr val="accent1"/>
+          </a:effectRef>
+          <a:fontRef idx="minor">
+            <a:schemeClr val="lt1"/>
+          </a:fontRef>
+        </p:style>
+        <p:txBody>
+          <a:bodyPr rtlCol="0" anchor="ctr"/>
+          <a:lstStyle/>
+          <a:p>
+            <a:pPr algn="ctr"/>
+            <a:endParaRPr kumimoji="1" lang="ja-JP" altLang="en-US"/>
+          </a:p>
+        </p:txBody>
+      </p:sp>
+      <p:sp>
+        <p:nvSpPr>
+          <p:cNvPr id="23" name="正方形/長方形 22">
+            <a:extLst>
+              <a:ext uri="{FF2B5EF4-FFF2-40B4-BE49-F238E27FC236}">
+                <a16:creationId xmlns:a16="http://schemas.microsoft.com/office/drawing/2014/main" id="{E9D195DC-8046-1B10-8DCB-D697BBFB113C}"/>
+              </a:ext>
+            </a:extLst>
+          </p:cNvPr>
+          <p:cNvSpPr/>
+          <p:nvPr/>
+        </p:nvSpPr>
+        <p:spPr>
+          <a:xfrm>
+            <a:off x="11178619" y="4524003"/>
+            <a:ext cx="580130" cy="517793"/>
+          </a:xfrm>
+          <a:prstGeom prst="rect">
+            <a:avLst/>
+          </a:prstGeom>
+          <a:solidFill>
+            <a:srgbClr val="CA8F0C"/>
+          </a:solidFill>
+        </p:spPr>
+        <p:style>
+          <a:lnRef idx="2">
+            <a:schemeClr val="accent1">
+              <a:shade val="15000"/>
+            </a:schemeClr>
+          </a:lnRef>
+          <a:fillRef idx="1">
+            <a:schemeClr val="accent1"/>
+          </a:fillRef>
+          <a:effectRef idx="0">
+            <a:schemeClr val="accent1"/>
+          </a:effectRef>
+          <a:fontRef idx="minor">
+            <a:schemeClr val="lt1"/>
+          </a:fontRef>
+        </p:style>
+        <p:txBody>
+          <a:bodyPr rtlCol="0" anchor="ctr"/>
+          <a:lstStyle/>
+          <a:p>
+            <a:pPr algn="ctr"/>
+            <a:endParaRPr kumimoji="1" lang="ja-JP" altLang="en-US"/>
+          </a:p>
+        </p:txBody>
+      </p:sp>
+      <p:sp>
+        <p:nvSpPr>
+          <p:cNvPr id="24" name="正方形/長方形 23">
+            <a:extLst>
+              <a:ext uri="{FF2B5EF4-FFF2-40B4-BE49-F238E27FC236}">
+                <a16:creationId xmlns:a16="http://schemas.microsoft.com/office/drawing/2014/main" id="{D6C3B78B-8056-3E5D-80AB-10C81900E0B5}"/>
+              </a:ext>
+            </a:extLst>
+          </p:cNvPr>
+          <p:cNvSpPr/>
+          <p:nvPr/>
+        </p:nvSpPr>
+        <p:spPr>
+          <a:xfrm>
+            <a:off x="11753736" y="4517963"/>
+            <a:ext cx="580130" cy="517793"/>
+          </a:xfrm>
+          <a:prstGeom prst="rect">
+            <a:avLst/>
+          </a:prstGeom>
+          <a:solidFill>
+            <a:srgbClr val="CA8F0C"/>
+          </a:solidFill>
+        </p:spPr>
+        <p:style>
+          <a:lnRef idx="2">
+            <a:schemeClr val="accent1">
+              <a:shade val="15000"/>
+            </a:schemeClr>
+          </a:lnRef>
+          <a:fillRef idx="1">
+            <a:schemeClr val="accent1"/>
+          </a:fillRef>
+          <a:effectRef idx="0">
+            <a:schemeClr val="accent1"/>
+          </a:effectRef>
+          <a:fontRef idx="minor">
+            <a:schemeClr val="lt1"/>
+          </a:fontRef>
+        </p:style>
+        <p:txBody>
+          <a:bodyPr rtlCol="0" anchor="ctr"/>
+          <a:lstStyle/>
+          <a:p>
+            <a:pPr algn="ctr"/>
+            <a:endParaRPr kumimoji="1" lang="ja-JP" altLang="en-US"/>
+          </a:p>
+        </p:txBody>
+      </p:sp>
+      <p:sp>
+        <p:nvSpPr>
+          <p:cNvPr id="25" name="正方形/長方形 24">
+            <a:extLst>
+              <a:ext uri="{FF2B5EF4-FFF2-40B4-BE49-F238E27FC236}">
+                <a16:creationId xmlns:a16="http://schemas.microsoft.com/office/drawing/2014/main" id="{75B889F1-30C2-6D20-89EB-218CF74EE11A}"/>
+              </a:ext>
+            </a:extLst>
+          </p:cNvPr>
+          <p:cNvSpPr/>
+          <p:nvPr/>
+        </p:nvSpPr>
+        <p:spPr>
+          <a:xfrm>
+            <a:off x="11766928" y="4016533"/>
+            <a:ext cx="580130" cy="517793"/>
+          </a:xfrm>
+          <a:prstGeom prst="rect">
+            <a:avLst/>
+          </a:prstGeom>
+          <a:solidFill>
+            <a:srgbClr val="CA8F0C"/>
+          </a:solidFill>
+        </p:spPr>
+        <p:style>
+          <a:lnRef idx="2">
+            <a:schemeClr val="accent1">
+              <a:shade val="15000"/>
+            </a:schemeClr>
+          </a:lnRef>
+          <a:fillRef idx="1">
+            <a:schemeClr val="accent1"/>
+          </a:fillRef>
+          <a:effectRef idx="0">
+            <a:schemeClr val="accent1"/>
+          </a:effectRef>
+          <a:fontRef idx="minor">
+            <a:schemeClr val="lt1"/>
+          </a:fontRef>
+        </p:style>
+        <p:txBody>
+          <a:bodyPr rtlCol="0" anchor="ctr"/>
+          <a:lstStyle/>
+          <a:p>
+            <a:pPr algn="ctr"/>
+            <a:endParaRPr kumimoji="1" lang="ja-JP" altLang="en-US"/>
           </a:p>
         </p:txBody>
       </p:sp>
@@ -5220,6 +5721,1362 @@
     <p:extLst>
       <p:ext uri="{BB962C8B-B14F-4D97-AF65-F5344CB8AC3E}">
         <p14:creationId xmlns:p14="http://schemas.microsoft.com/office/powerpoint/2010/main" val="3936661780"/>
+      </p:ext>
+    </p:extLst>
+  </p:cSld>
+  <p:clrMapOvr>
+    <a:masterClrMapping/>
+  </p:clrMapOvr>
+</p:sld>
+</file>
+
+<file path=ppt/slides/slide4.xml><?xml version="1.0" encoding="utf-8"?>
+<p:sld xmlns:a="http://schemas.openxmlformats.org/drawingml/2006/main" xmlns:r="http://schemas.openxmlformats.org/officeDocument/2006/relationships" xmlns:p="http://schemas.openxmlformats.org/presentationml/2006/main">
+  <p:cSld>
+    <p:spTree>
+      <p:nvGrpSpPr>
+        <p:cNvPr id="1" name="">
+          <a:extLst>
+            <a:ext uri="{FF2B5EF4-FFF2-40B4-BE49-F238E27FC236}">
+              <a16:creationId xmlns:a16="http://schemas.microsoft.com/office/drawing/2014/main" id="{10F128E1-DB9A-409D-5619-A2FDA36C4699}"/>
+            </a:ext>
+          </a:extLst>
+        </p:cNvPr>
+        <p:cNvGrpSpPr/>
+        <p:nvPr/>
+      </p:nvGrpSpPr>
+      <p:grpSpPr>
+        <a:xfrm>
+          <a:off x="0" y="0"/>
+          <a:ext cx="0" cy="0"/>
+          <a:chOff x="0" y="0"/>
+          <a:chExt cx="0" cy="0"/>
+        </a:xfrm>
+      </p:grpSpPr>
+      <p:pic>
+        <p:nvPicPr>
+          <p:cNvPr id="3" name="図 2" descr="グラフ, ヒストグラム&#10;&#10;AI 生成コンテンツは誤りを含む可能性があります。">
+            <a:extLst>
+              <a:ext uri="{FF2B5EF4-FFF2-40B4-BE49-F238E27FC236}">
+                <a16:creationId xmlns:a16="http://schemas.microsoft.com/office/drawing/2014/main" id="{D2BC98FC-9546-CEE8-F10D-775E29496B92}"/>
+              </a:ext>
+            </a:extLst>
+          </p:cNvPr>
+          <p:cNvPicPr>
+            <a:picLocks noChangeAspect="1"/>
+          </p:cNvPicPr>
+          <p:nvPr/>
+        </p:nvPicPr>
+        <p:blipFill>
+          <a:blip r:embed="rId2">
+            <a:extLst>
+              <a:ext uri="{28A0092B-C50C-407E-A947-70E740481C1C}">
+                <a14:useLocalDpi xmlns:a14="http://schemas.microsoft.com/office/drawing/2010/main" val="0"/>
+              </a:ext>
+            </a:extLst>
+          </a:blip>
+          <a:stretch>
+            <a:fillRect/>
+          </a:stretch>
+        </p:blipFill>
+        <p:spPr>
+          <a:xfrm>
+            <a:off x="0" y="-8269"/>
+            <a:ext cx="12191204" cy="6858001"/>
+          </a:xfrm>
+          <a:prstGeom prst="rect">
+            <a:avLst/>
+          </a:prstGeom>
+        </p:spPr>
+      </p:pic>
+      <p:sp>
+        <p:nvSpPr>
+          <p:cNvPr id="4" name="雲 3">
+            <a:extLst>
+              <a:ext uri="{FF2B5EF4-FFF2-40B4-BE49-F238E27FC236}">
+                <a16:creationId xmlns:a16="http://schemas.microsoft.com/office/drawing/2014/main" id="{31D81837-C1EB-AE50-9F55-3C88D50DE7E3}"/>
+              </a:ext>
+            </a:extLst>
+          </p:cNvPr>
+          <p:cNvSpPr/>
+          <p:nvPr/>
+        </p:nvSpPr>
+        <p:spPr>
+          <a:xfrm>
+            <a:off x="381498" y="175400"/>
+            <a:ext cx="3053245" cy="1888346"/>
+          </a:xfrm>
+          <a:prstGeom prst="cloud">
+            <a:avLst/>
+          </a:prstGeom>
+          <a:solidFill>
+            <a:schemeClr val="bg1"/>
+          </a:solidFill>
+          <a:ln>
+            <a:solidFill>
+              <a:schemeClr val="tx1"/>
+            </a:solidFill>
+          </a:ln>
+        </p:spPr>
+        <p:style>
+          <a:lnRef idx="2">
+            <a:schemeClr val="accent1">
+              <a:shade val="15000"/>
+            </a:schemeClr>
+          </a:lnRef>
+          <a:fillRef idx="1">
+            <a:schemeClr val="accent1"/>
+          </a:fillRef>
+          <a:effectRef idx="0">
+            <a:schemeClr val="accent1"/>
+          </a:effectRef>
+          <a:fontRef idx="minor">
+            <a:schemeClr val="lt1"/>
+          </a:fontRef>
+        </p:style>
+        <p:txBody>
+          <a:bodyPr rtlCol="0" anchor="ctr"/>
+          <a:lstStyle/>
+          <a:p>
+            <a:pPr algn="ctr"/>
+            <a:endParaRPr kumimoji="1" lang="ja-JP" altLang="en-US" dirty="0"/>
+          </a:p>
+        </p:txBody>
+      </p:sp>
+      <p:sp>
+        <p:nvSpPr>
+          <p:cNvPr id="5" name="テキスト ボックス 4">
+            <a:extLst>
+              <a:ext uri="{FF2B5EF4-FFF2-40B4-BE49-F238E27FC236}">
+                <a16:creationId xmlns:a16="http://schemas.microsoft.com/office/drawing/2014/main" id="{74113C67-2AED-750F-9175-581268ECF40A}"/>
+              </a:ext>
+            </a:extLst>
+          </p:cNvPr>
+          <p:cNvSpPr txBox="1"/>
+          <p:nvPr/>
+        </p:nvSpPr>
+        <p:spPr>
+          <a:xfrm>
+            <a:off x="564615" y="343622"/>
+            <a:ext cx="3053245" cy="1446550"/>
+          </a:xfrm>
+          <a:prstGeom prst="rect">
+            <a:avLst/>
+          </a:prstGeom>
+          <a:noFill/>
+        </p:spPr>
+        <p:txBody>
+          <a:bodyPr wrap="square" rtlCol="0">
+            <a:spAutoFit/>
+          </a:bodyPr>
+          <a:lstStyle/>
+          <a:p>
+            <a:r>
+              <a:rPr lang="ja-JP" altLang="en-US" sz="4400" dirty="0">
+                <a:latin typeface="HGP行書体" panose="03000600000000000000" pitchFamily="66" charset="-128"/>
+                <a:ea typeface="HGP行書体" panose="03000600000000000000" pitchFamily="66" charset="-128"/>
+              </a:rPr>
+              <a:t>工夫した点</a:t>
+            </a:r>
+            <a:endParaRPr lang="en-US" altLang="ja-JP" sz="4400" dirty="0">
+              <a:latin typeface="HGP行書体" panose="03000600000000000000" pitchFamily="66" charset="-128"/>
+              <a:ea typeface="HGP行書体" panose="03000600000000000000" pitchFamily="66" charset="-128"/>
+            </a:endParaRPr>
+          </a:p>
+          <a:p>
+            <a:r>
+              <a:rPr kumimoji="1" lang="ja-JP" altLang="en-US" sz="4400" dirty="0">
+                <a:latin typeface="HGP行書体" panose="03000600000000000000" pitchFamily="66" charset="-128"/>
+                <a:ea typeface="HGP行書体" panose="03000600000000000000" pitchFamily="66" charset="-128"/>
+              </a:rPr>
+              <a:t>苦労した点</a:t>
+            </a:r>
+          </a:p>
+        </p:txBody>
+      </p:sp>
+      <p:sp>
+        <p:nvSpPr>
+          <p:cNvPr id="2" name="正方形/長方形 1">
+            <a:extLst>
+              <a:ext uri="{FF2B5EF4-FFF2-40B4-BE49-F238E27FC236}">
+                <a16:creationId xmlns:a16="http://schemas.microsoft.com/office/drawing/2014/main" id="{8DC5975F-FC8B-880E-EAED-AB3C2B392469}"/>
+              </a:ext>
+            </a:extLst>
+          </p:cNvPr>
+          <p:cNvSpPr/>
+          <p:nvPr/>
+        </p:nvSpPr>
+        <p:spPr>
+          <a:xfrm>
+            <a:off x="4772297" y="3962400"/>
+            <a:ext cx="2508069" cy="2098766"/>
+          </a:xfrm>
+          <a:prstGeom prst="rect">
+            <a:avLst/>
+          </a:prstGeom>
+          <a:solidFill>
+            <a:schemeClr val="accent1">
+              <a:lumMod val="40000"/>
+              <a:lumOff val="60000"/>
+            </a:schemeClr>
+          </a:solidFill>
+          <a:ln>
+            <a:solidFill>
+              <a:schemeClr val="accent1">
+                <a:lumMod val="40000"/>
+                <a:lumOff val="60000"/>
+              </a:schemeClr>
+            </a:solidFill>
+          </a:ln>
+        </p:spPr>
+        <p:style>
+          <a:lnRef idx="2">
+            <a:schemeClr val="accent1">
+              <a:shade val="15000"/>
+            </a:schemeClr>
+          </a:lnRef>
+          <a:fillRef idx="1">
+            <a:schemeClr val="accent1"/>
+          </a:fillRef>
+          <a:effectRef idx="0">
+            <a:schemeClr val="accent1"/>
+          </a:effectRef>
+          <a:fontRef idx="minor">
+            <a:schemeClr val="lt1"/>
+          </a:fontRef>
+        </p:style>
+        <p:txBody>
+          <a:bodyPr rtlCol="0" anchor="ctr"/>
+          <a:lstStyle/>
+          <a:p>
+            <a:pPr algn="ctr"/>
+            <a:endParaRPr kumimoji="1" lang="ja-JP" altLang="en-US"/>
+          </a:p>
+        </p:txBody>
+      </p:sp>
+      <p:sp>
+        <p:nvSpPr>
+          <p:cNvPr id="18" name="正方形/長方形 17">
+            <a:extLst>
+              <a:ext uri="{FF2B5EF4-FFF2-40B4-BE49-F238E27FC236}">
+                <a16:creationId xmlns:a16="http://schemas.microsoft.com/office/drawing/2014/main" id="{A7B00A5D-F138-BDF9-9F0C-017FA9FE014E}"/>
+              </a:ext>
+            </a:extLst>
+          </p:cNvPr>
+          <p:cNvSpPr/>
+          <p:nvPr/>
+        </p:nvSpPr>
+        <p:spPr>
+          <a:xfrm>
+            <a:off x="0" y="5543373"/>
+            <a:ext cx="580130" cy="517793"/>
+          </a:xfrm>
+          <a:prstGeom prst="rect">
+            <a:avLst/>
+          </a:prstGeom>
+          <a:solidFill>
+            <a:srgbClr val="CA8F0C"/>
+          </a:solidFill>
+        </p:spPr>
+        <p:style>
+          <a:lnRef idx="2">
+            <a:schemeClr val="accent1">
+              <a:shade val="15000"/>
+            </a:schemeClr>
+          </a:lnRef>
+          <a:fillRef idx="1">
+            <a:schemeClr val="accent1"/>
+          </a:fillRef>
+          <a:effectRef idx="0">
+            <a:schemeClr val="accent1"/>
+          </a:effectRef>
+          <a:fontRef idx="minor">
+            <a:schemeClr val="lt1"/>
+          </a:fontRef>
+        </p:style>
+        <p:txBody>
+          <a:bodyPr rtlCol="0" anchor="ctr"/>
+          <a:lstStyle/>
+          <a:p>
+            <a:pPr algn="ctr"/>
+            <a:endParaRPr kumimoji="1" lang="ja-JP" altLang="en-US"/>
+          </a:p>
+        </p:txBody>
+      </p:sp>
+      <p:sp>
+        <p:nvSpPr>
+          <p:cNvPr id="19" name="正方形/長方形 18">
+            <a:extLst>
+              <a:ext uri="{FF2B5EF4-FFF2-40B4-BE49-F238E27FC236}">
+                <a16:creationId xmlns:a16="http://schemas.microsoft.com/office/drawing/2014/main" id="{8B1EE724-BCF3-3CBD-4D1E-F69ED72C02DA}"/>
+              </a:ext>
+            </a:extLst>
+          </p:cNvPr>
+          <p:cNvSpPr/>
+          <p:nvPr/>
+        </p:nvSpPr>
+        <p:spPr>
+          <a:xfrm>
+            <a:off x="0" y="5010902"/>
+            <a:ext cx="580130" cy="517793"/>
+          </a:xfrm>
+          <a:prstGeom prst="rect">
+            <a:avLst/>
+          </a:prstGeom>
+          <a:solidFill>
+            <a:srgbClr val="CA8F0C"/>
+          </a:solidFill>
+        </p:spPr>
+        <p:style>
+          <a:lnRef idx="2">
+            <a:schemeClr val="accent1">
+              <a:shade val="15000"/>
+            </a:schemeClr>
+          </a:lnRef>
+          <a:fillRef idx="1">
+            <a:schemeClr val="accent1"/>
+          </a:fillRef>
+          <a:effectRef idx="0">
+            <a:schemeClr val="accent1"/>
+          </a:effectRef>
+          <a:fontRef idx="minor">
+            <a:schemeClr val="lt1"/>
+          </a:fontRef>
+        </p:style>
+        <p:txBody>
+          <a:bodyPr rtlCol="0" anchor="ctr"/>
+          <a:lstStyle/>
+          <a:p>
+            <a:pPr algn="ctr"/>
+            <a:endParaRPr kumimoji="1" lang="ja-JP" altLang="en-US"/>
+          </a:p>
+        </p:txBody>
+      </p:sp>
+      <p:sp>
+        <p:nvSpPr>
+          <p:cNvPr id="20" name="正方形/長方形 19">
+            <a:extLst>
+              <a:ext uri="{FF2B5EF4-FFF2-40B4-BE49-F238E27FC236}">
+                <a16:creationId xmlns:a16="http://schemas.microsoft.com/office/drawing/2014/main" id="{403DF947-BDE6-6594-B3CB-26B77748B6BB}"/>
+              </a:ext>
+            </a:extLst>
+          </p:cNvPr>
+          <p:cNvSpPr/>
+          <p:nvPr/>
+        </p:nvSpPr>
+        <p:spPr>
+          <a:xfrm>
+            <a:off x="0" y="4478431"/>
+            <a:ext cx="580130" cy="517793"/>
+          </a:xfrm>
+          <a:prstGeom prst="rect">
+            <a:avLst/>
+          </a:prstGeom>
+          <a:solidFill>
+            <a:srgbClr val="CA8F0C"/>
+          </a:solidFill>
+        </p:spPr>
+        <p:style>
+          <a:lnRef idx="2">
+            <a:schemeClr val="accent1">
+              <a:shade val="15000"/>
+            </a:schemeClr>
+          </a:lnRef>
+          <a:fillRef idx="1">
+            <a:schemeClr val="accent1"/>
+          </a:fillRef>
+          <a:effectRef idx="0">
+            <a:schemeClr val="accent1"/>
+          </a:effectRef>
+          <a:fontRef idx="minor">
+            <a:schemeClr val="lt1"/>
+          </a:fontRef>
+        </p:style>
+        <p:txBody>
+          <a:bodyPr rtlCol="0" anchor="ctr"/>
+          <a:lstStyle/>
+          <a:p>
+            <a:pPr algn="ctr"/>
+            <a:endParaRPr kumimoji="1" lang="ja-JP" altLang="en-US"/>
+          </a:p>
+        </p:txBody>
+      </p:sp>
+      <p:sp>
+        <p:nvSpPr>
+          <p:cNvPr id="21" name="正方形/長方形 20">
+            <a:extLst>
+              <a:ext uri="{FF2B5EF4-FFF2-40B4-BE49-F238E27FC236}">
+                <a16:creationId xmlns:a16="http://schemas.microsoft.com/office/drawing/2014/main" id="{89652ABF-F284-011D-ED76-0DFA5B762F2A}"/>
+              </a:ext>
+            </a:extLst>
+          </p:cNvPr>
+          <p:cNvSpPr/>
+          <p:nvPr/>
+        </p:nvSpPr>
+        <p:spPr>
+          <a:xfrm>
+            <a:off x="0" y="3962400"/>
+            <a:ext cx="580130" cy="517793"/>
+          </a:xfrm>
+          <a:prstGeom prst="rect">
+            <a:avLst/>
+          </a:prstGeom>
+          <a:solidFill>
+            <a:srgbClr val="CA8F0C"/>
+          </a:solidFill>
+        </p:spPr>
+        <p:style>
+          <a:lnRef idx="2">
+            <a:schemeClr val="accent1">
+              <a:shade val="15000"/>
+            </a:schemeClr>
+          </a:lnRef>
+          <a:fillRef idx="1">
+            <a:schemeClr val="accent1"/>
+          </a:fillRef>
+          <a:effectRef idx="0">
+            <a:schemeClr val="accent1"/>
+          </a:effectRef>
+          <a:fontRef idx="minor">
+            <a:schemeClr val="lt1"/>
+          </a:fontRef>
+        </p:style>
+        <p:txBody>
+          <a:bodyPr rtlCol="0" anchor="ctr"/>
+          <a:lstStyle/>
+          <a:p>
+            <a:pPr algn="ctr"/>
+            <a:endParaRPr kumimoji="1" lang="ja-JP" altLang="en-US"/>
+          </a:p>
+        </p:txBody>
+      </p:sp>
+      <p:sp>
+        <p:nvSpPr>
+          <p:cNvPr id="22" name="正方形/長方形 21">
+            <a:extLst>
+              <a:ext uri="{FF2B5EF4-FFF2-40B4-BE49-F238E27FC236}">
+                <a16:creationId xmlns:a16="http://schemas.microsoft.com/office/drawing/2014/main" id="{B9A83FB5-ACDE-8487-FF7D-D96E115C6177}"/>
+              </a:ext>
+            </a:extLst>
+          </p:cNvPr>
+          <p:cNvSpPr/>
+          <p:nvPr/>
+        </p:nvSpPr>
+        <p:spPr>
+          <a:xfrm>
+            <a:off x="0" y="3437268"/>
+            <a:ext cx="580130" cy="517793"/>
+          </a:xfrm>
+          <a:prstGeom prst="rect">
+            <a:avLst/>
+          </a:prstGeom>
+          <a:solidFill>
+            <a:srgbClr val="CA8F0C"/>
+          </a:solidFill>
+        </p:spPr>
+        <p:style>
+          <a:lnRef idx="2">
+            <a:schemeClr val="accent1">
+              <a:shade val="15000"/>
+            </a:schemeClr>
+          </a:lnRef>
+          <a:fillRef idx="1">
+            <a:schemeClr val="accent1"/>
+          </a:fillRef>
+          <a:effectRef idx="0">
+            <a:schemeClr val="accent1"/>
+          </a:effectRef>
+          <a:fontRef idx="minor">
+            <a:schemeClr val="lt1"/>
+          </a:fontRef>
+        </p:style>
+        <p:txBody>
+          <a:bodyPr rtlCol="0" anchor="ctr"/>
+          <a:lstStyle/>
+          <a:p>
+            <a:pPr algn="ctr"/>
+            <a:endParaRPr kumimoji="1" lang="ja-JP" altLang="en-US"/>
+          </a:p>
+        </p:txBody>
+      </p:sp>
+      <p:sp>
+        <p:nvSpPr>
+          <p:cNvPr id="23" name="正方形/長方形 22">
+            <a:extLst>
+              <a:ext uri="{FF2B5EF4-FFF2-40B4-BE49-F238E27FC236}">
+                <a16:creationId xmlns:a16="http://schemas.microsoft.com/office/drawing/2014/main" id="{7BB38C03-50F5-F3B3-6C9E-77AFCC7498ED}"/>
+              </a:ext>
+            </a:extLst>
+          </p:cNvPr>
+          <p:cNvSpPr/>
+          <p:nvPr/>
+        </p:nvSpPr>
+        <p:spPr>
+          <a:xfrm>
+            <a:off x="0" y="2919475"/>
+            <a:ext cx="580130" cy="517793"/>
+          </a:xfrm>
+          <a:prstGeom prst="rect">
+            <a:avLst/>
+          </a:prstGeom>
+          <a:solidFill>
+            <a:srgbClr val="CA8F0C"/>
+          </a:solidFill>
+        </p:spPr>
+        <p:style>
+          <a:lnRef idx="2">
+            <a:schemeClr val="accent1">
+              <a:shade val="15000"/>
+            </a:schemeClr>
+          </a:lnRef>
+          <a:fillRef idx="1">
+            <a:schemeClr val="accent1"/>
+          </a:fillRef>
+          <a:effectRef idx="0">
+            <a:schemeClr val="accent1"/>
+          </a:effectRef>
+          <a:fontRef idx="minor">
+            <a:schemeClr val="lt1"/>
+          </a:fontRef>
+        </p:style>
+        <p:txBody>
+          <a:bodyPr rtlCol="0" anchor="ctr"/>
+          <a:lstStyle/>
+          <a:p>
+            <a:pPr algn="ctr"/>
+            <a:endParaRPr kumimoji="1" lang="ja-JP" altLang="en-US"/>
+          </a:p>
+        </p:txBody>
+      </p:sp>
+      <p:sp>
+        <p:nvSpPr>
+          <p:cNvPr id="24" name="正方形/長方形 23">
+            <a:extLst>
+              <a:ext uri="{FF2B5EF4-FFF2-40B4-BE49-F238E27FC236}">
+                <a16:creationId xmlns:a16="http://schemas.microsoft.com/office/drawing/2014/main" id="{F5268889-6AB0-6AD3-F198-80D0BF19CA88}"/>
+              </a:ext>
+            </a:extLst>
+          </p:cNvPr>
+          <p:cNvSpPr/>
+          <p:nvPr/>
+        </p:nvSpPr>
+        <p:spPr>
+          <a:xfrm>
+            <a:off x="0" y="2381537"/>
+            <a:ext cx="580130" cy="517793"/>
+          </a:xfrm>
+          <a:prstGeom prst="rect">
+            <a:avLst/>
+          </a:prstGeom>
+          <a:solidFill>
+            <a:srgbClr val="CA8F0C"/>
+          </a:solidFill>
+        </p:spPr>
+        <p:style>
+          <a:lnRef idx="2">
+            <a:schemeClr val="accent1">
+              <a:shade val="15000"/>
+            </a:schemeClr>
+          </a:lnRef>
+          <a:fillRef idx="1">
+            <a:schemeClr val="accent1"/>
+          </a:fillRef>
+          <a:effectRef idx="0">
+            <a:schemeClr val="accent1"/>
+          </a:effectRef>
+          <a:fontRef idx="minor">
+            <a:schemeClr val="lt1"/>
+          </a:fontRef>
+        </p:style>
+        <p:txBody>
+          <a:bodyPr rtlCol="0" anchor="ctr"/>
+          <a:lstStyle/>
+          <a:p>
+            <a:pPr algn="ctr"/>
+            <a:endParaRPr kumimoji="1" lang="ja-JP" altLang="en-US"/>
+          </a:p>
+        </p:txBody>
+      </p:sp>
+      <p:sp>
+        <p:nvSpPr>
+          <p:cNvPr id="25" name="正方形/長方形 24">
+            <a:extLst>
+              <a:ext uri="{FF2B5EF4-FFF2-40B4-BE49-F238E27FC236}">
+                <a16:creationId xmlns:a16="http://schemas.microsoft.com/office/drawing/2014/main" id="{461B701B-E9A4-5BCB-BB57-C901935C9237}"/>
+              </a:ext>
+            </a:extLst>
+          </p:cNvPr>
+          <p:cNvSpPr/>
+          <p:nvPr/>
+        </p:nvSpPr>
+        <p:spPr>
+          <a:xfrm>
+            <a:off x="2800682" y="5543373"/>
+            <a:ext cx="580130" cy="517793"/>
+          </a:xfrm>
+          <a:prstGeom prst="rect">
+            <a:avLst/>
+          </a:prstGeom>
+          <a:solidFill>
+            <a:srgbClr val="CA8F0C"/>
+          </a:solidFill>
+        </p:spPr>
+        <p:style>
+          <a:lnRef idx="2">
+            <a:schemeClr val="accent1">
+              <a:shade val="15000"/>
+            </a:schemeClr>
+          </a:lnRef>
+          <a:fillRef idx="1">
+            <a:schemeClr val="accent1"/>
+          </a:fillRef>
+          <a:effectRef idx="0">
+            <a:schemeClr val="accent1"/>
+          </a:effectRef>
+          <a:fontRef idx="minor">
+            <a:schemeClr val="lt1"/>
+          </a:fontRef>
+        </p:style>
+        <p:txBody>
+          <a:bodyPr rtlCol="0" anchor="ctr"/>
+          <a:lstStyle/>
+          <a:p>
+            <a:pPr algn="ctr"/>
+            <a:endParaRPr kumimoji="1" lang="ja-JP" altLang="en-US"/>
+          </a:p>
+        </p:txBody>
+      </p:sp>
+      <p:sp>
+        <p:nvSpPr>
+          <p:cNvPr id="26" name="正方形/長方形 25">
+            <a:extLst>
+              <a:ext uri="{FF2B5EF4-FFF2-40B4-BE49-F238E27FC236}">
+                <a16:creationId xmlns:a16="http://schemas.microsoft.com/office/drawing/2014/main" id="{5C38A6D0-BE30-79A2-F0A9-0D4D2119A8BE}"/>
+              </a:ext>
+            </a:extLst>
+          </p:cNvPr>
+          <p:cNvSpPr/>
+          <p:nvPr/>
+        </p:nvSpPr>
+        <p:spPr>
+          <a:xfrm>
+            <a:off x="3056708" y="1863634"/>
+            <a:ext cx="84087" cy="3665061"/>
+          </a:xfrm>
+          <a:prstGeom prst="rect">
+            <a:avLst/>
+          </a:prstGeom>
+          <a:solidFill>
+            <a:schemeClr val="bg1"/>
+          </a:solidFill>
+        </p:spPr>
+        <p:style>
+          <a:lnRef idx="2">
+            <a:schemeClr val="accent1">
+              <a:shade val="15000"/>
+            </a:schemeClr>
+          </a:lnRef>
+          <a:fillRef idx="1">
+            <a:schemeClr val="accent1"/>
+          </a:fillRef>
+          <a:effectRef idx="0">
+            <a:schemeClr val="accent1"/>
+          </a:effectRef>
+          <a:fontRef idx="minor">
+            <a:schemeClr val="lt1"/>
+          </a:fontRef>
+        </p:style>
+        <p:txBody>
+          <a:bodyPr rtlCol="0" anchor="ctr"/>
+          <a:lstStyle/>
+          <a:p>
+            <a:pPr algn="ctr"/>
+            <a:endParaRPr kumimoji="1" lang="ja-JP" altLang="en-US"/>
+          </a:p>
+        </p:txBody>
+      </p:sp>
+      <p:sp>
+        <p:nvSpPr>
+          <p:cNvPr id="27" name="楕円 26">
+            <a:extLst>
+              <a:ext uri="{FF2B5EF4-FFF2-40B4-BE49-F238E27FC236}">
+                <a16:creationId xmlns:a16="http://schemas.microsoft.com/office/drawing/2014/main" id="{E3E34010-E4F2-A8D6-4207-781553FEB133}"/>
+              </a:ext>
+            </a:extLst>
+          </p:cNvPr>
+          <p:cNvSpPr/>
+          <p:nvPr/>
+        </p:nvSpPr>
+        <p:spPr>
+          <a:xfrm>
+            <a:off x="3020373" y="1701718"/>
+            <a:ext cx="156755" cy="154577"/>
+          </a:xfrm>
+          <a:prstGeom prst="ellipse">
+            <a:avLst/>
+          </a:prstGeom>
+          <a:solidFill>
+            <a:srgbClr val="FF0000"/>
+          </a:solidFill>
+        </p:spPr>
+        <p:style>
+          <a:lnRef idx="2">
+            <a:schemeClr val="accent1">
+              <a:shade val="15000"/>
+            </a:schemeClr>
+          </a:lnRef>
+          <a:fillRef idx="1">
+            <a:schemeClr val="accent1"/>
+          </a:fillRef>
+          <a:effectRef idx="0">
+            <a:schemeClr val="accent1"/>
+          </a:effectRef>
+          <a:fontRef idx="minor">
+            <a:schemeClr val="lt1"/>
+          </a:fontRef>
+        </p:style>
+        <p:txBody>
+          <a:bodyPr rtlCol="0" anchor="ctr"/>
+          <a:lstStyle/>
+          <a:p>
+            <a:pPr algn="ctr"/>
+            <a:endParaRPr kumimoji="1" lang="ja-JP" altLang="en-US"/>
+          </a:p>
+        </p:txBody>
+      </p:sp>
+      <p:sp>
+        <p:nvSpPr>
+          <p:cNvPr id="28" name="二等辺三角形 27">
+            <a:extLst>
+              <a:ext uri="{FF2B5EF4-FFF2-40B4-BE49-F238E27FC236}">
+                <a16:creationId xmlns:a16="http://schemas.microsoft.com/office/drawing/2014/main" id="{D6B0E5FE-1694-348B-16A8-AD40007493DD}"/>
+              </a:ext>
+            </a:extLst>
+          </p:cNvPr>
+          <p:cNvSpPr/>
+          <p:nvPr/>
+        </p:nvSpPr>
+        <p:spPr>
+          <a:xfrm rot="16200000">
+            <a:off x="2537029" y="1806265"/>
+            <a:ext cx="451462" cy="566199"/>
+          </a:xfrm>
+          <a:prstGeom prst="triangle">
+            <a:avLst/>
+          </a:prstGeom>
+          <a:solidFill>
+            <a:srgbClr val="FFFF00"/>
+          </a:solidFill>
+        </p:spPr>
+        <p:style>
+          <a:lnRef idx="2">
+            <a:schemeClr val="accent1">
+              <a:shade val="15000"/>
+            </a:schemeClr>
+          </a:lnRef>
+          <a:fillRef idx="1">
+            <a:schemeClr val="accent1"/>
+          </a:fillRef>
+          <a:effectRef idx="0">
+            <a:schemeClr val="accent1"/>
+          </a:effectRef>
+          <a:fontRef idx="minor">
+            <a:schemeClr val="lt1"/>
+          </a:fontRef>
+        </p:style>
+        <p:txBody>
+          <a:bodyPr rtlCol="0" anchor="ctr"/>
+          <a:lstStyle/>
+          <a:p>
+            <a:pPr algn="ctr"/>
+            <a:endParaRPr kumimoji="1" lang="ja-JP" altLang="en-US"/>
+          </a:p>
+        </p:txBody>
+      </p:sp>
+      <p:sp>
+        <p:nvSpPr>
+          <p:cNvPr id="29" name="テキスト ボックス 28">
+            <a:extLst>
+              <a:ext uri="{FF2B5EF4-FFF2-40B4-BE49-F238E27FC236}">
+                <a16:creationId xmlns:a16="http://schemas.microsoft.com/office/drawing/2014/main" id="{B5944125-5289-7A42-0D37-5DD3F920F2B2}"/>
+              </a:ext>
+            </a:extLst>
+          </p:cNvPr>
+          <p:cNvSpPr txBox="1"/>
+          <p:nvPr/>
+        </p:nvSpPr>
+        <p:spPr>
+          <a:xfrm>
+            <a:off x="3617860" y="343622"/>
+            <a:ext cx="3053245" cy="523220"/>
+          </a:xfrm>
+          <a:prstGeom prst="rect">
+            <a:avLst/>
+          </a:prstGeom>
+          <a:noFill/>
+        </p:spPr>
+        <p:txBody>
+          <a:bodyPr wrap="square" rtlCol="0">
+            <a:spAutoFit/>
+          </a:bodyPr>
+          <a:lstStyle/>
+          <a:p>
+            <a:r>
+              <a:rPr kumimoji="1" lang="ja-JP" altLang="en-US" sz="2800" b="1" dirty="0">
+                <a:latin typeface="HGS創英角ﾎﾟｯﾌﾟ体" panose="040B0A00000000000000" pitchFamily="82" charset="-128"/>
+                <a:ea typeface="HGS創英角ﾎﾟｯﾌﾟ体" panose="040B0A00000000000000" pitchFamily="82" charset="-128"/>
+              </a:rPr>
+              <a:t>工夫した点</a:t>
+            </a:r>
+          </a:p>
+        </p:txBody>
+      </p:sp>
+      <p:sp>
+        <p:nvSpPr>
+          <p:cNvPr id="30" name="テキスト ボックス 29">
+            <a:extLst>
+              <a:ext uri="{FF2B5EF4-FFF2-40B4-BE49-F238E27FC236}">
+                <a16:creationId xmlns:a16="http://schemas.microsoft.com/office/drawing/2014/main" id="{B1BCD621-6861-61E5-BACC-9773EAD6ED56}"/>
+              </a:ext>
+            </a:extLst>
+          </p:cNvPr>
+          <p:cNvSpPr txBox="1"/>
+          <p:nvPr/>
+        </p:nvSpPr>
+        <p:spPr>
+          <a:xfrm>
+            <a:off x="4037086" y="1061070"/>
+            <a:ext cx="7133762" cy="400110"/>
+          </a:xfrm>
+          <a:prstGeom prst="rect">
+            <a:avLst/>
+          </a:prstGeom>
+          <a:noFill/>
+        </p:spPr>
+        <p:txBody>
+          <a:bodyPr wrap="square" rtlCol="0">
+            <a:spAutoFit/>
+          </a:bodyPr>
+          <a:lstStyle/>
+          <a:p>
+            <a:r>
+              <a:rPr kumimoji="1" lang="ja-JP" altLang="en-US" sz="2000" b="1" dirty="0"/>
+              <a:t>・パワーアップアイテムを取ると攻撃ができるようにした</a:t>
+            </a:r>
+          </a:p>
+        </p:txBody>
+      </p:sp>
+      <p:sp>
+        <p:nvSpPr>
+          <p:cNvPr id="31" name="テキスト ボックス 30">
+            <a:extLst>
+              <a:ext uri="{FF2B5EF4-FFF2-40B4-BE49-F238E27FC236}">
+                <a16:creationId xmlns:a16="http://schemas.microsoft.com/office/drawing/2014/main" id="{FE984F1D-0F97-74B0-CD57-A08A5EB6D4E6}"/>
+              </a:ext>
+            </a:extLst>
+          </p:cNvPr>
+          <p:cNvSpPr txBox="1"/>
+          <p:nvPr/>
+        </p:nvSpPr>
+        <p:spPr>
+          <a:xfrm>
+            <a:off x="4037086" y="1456185"/>
+            <a:ext cx="7133762" cy="400110"/>
+          </a:xfrm>
+          <a:prstGeom prst="rect">
+            <a:avLst/>
+          </a:prstGeom>
+          <a:noFill/>
+        </p:spPr>
+        <p:txBody>
+          <a:bodyPr wrap="square" rtlCol="0">
+            <a:spAutoFit/>
+          </a:bodyPr>
+          <a:lstStyle/>
+          <a:p>
+            <a:r>
+              <a:rPr kumimoji="1" lang="ja-JP" altLang="en-US" sz="2000" b="1" dirty="0"/>
+              <a:t>・ボスは自機を追尾してくるようにした</a:t>
+            </a:r>
+          </a:p>
+        </p:txBody>
+      </p:sp>
+      <p:sp>
+        <p:nvSpPr>
+          <p:cNvPr id="32" name="テキスト ボックス 31">
+            <a:extLst>
+              <a:ext uri="{FF2B5EF4-FFF2-40B4-BE49-F238E27FC236}">
+                <a16:creationId xmlns:a16="http://schemas.microsoft.com/office/drawing/2014/main" id="{74901B98-BB1B-9B88-281D-9696CB023E66}"/>
+              </a:ext>
+            </a:extLst>
+          </p:cNvPr>
+          <p:cNvSpPr txBox="1"/>
+          <p:nvPr/>
+        </p:nvSpPr>
+        <p:spPr>
+          <a:xfrm>
+            <a:off x="4037086" y="1850468"/>
+            <a:ext cx="7133762" cy="400110"/>
+          </a:xfrm>
+          <a:prstGeom prst="rect">
+            <a:avLst/>
+          </a:prstGeom>
+          <a:noFill/>
+        </p:spPr>
+        <p:txBody>
+          <a:bodyPr wrap="square" rtlCol="0">
+            <a:spAutoFit/>
+          </a:bodyPr>
+          <a:lstStyle/>
+          <a:p>
+            <a:r>
+              <a:rPr kumimoji="1" lang="ja-JP" altLang="en-US" sz="2000" b="1" dirty="0"/>
+              <a:t>・射出した弾は画面外にでると消えるようにした</a:t>
+            </a:r>
+          </a:p>
+        </p:txBody>
+      </p:sp>
+      <p:sp>
+        <p:nvSpPr>
+          <p:cNvPr id="33" name="テキスト ボックス 32">
+            <a:extLst>
+              <a:ext uri="{FF2B5EF4-FFF2-40B4-BE49-F238E27FC236}">
+                <a16:creationId xmlns:a16="http://schemas.microsoft.com/office/drawing/2014/main" id="{E685DAED-1941-51A7-6167-9908CFDA404C}"/>
+              </a:ext>
+            </a:extLst>
+          </p:cNvPr>
+          <p:cNvSpPr txBox="1"/>
+          <p:nvPr/>
+        </p:nvSpPr>
+        <p:spPr>
+          <a:xfrm>
+            <a:off x="3617859" y="2567089"/>
+            <a:ext cx="3053245" cy="523220"/>
+          </a:xfrm>
+          <a:prstGeom prst="rect">
+            <a:avLst/>
+          </a:prstGeom>
+          <a:noFill/>
+        </p:spPr>
+        <p:txBody>
+          <a:bodyPr wrap="square" rtlCol="0">
+            <a:spAutoFit/>
+          </a:bodyPr>
+          <a:lstStyle/>
+          <a:p>
+            <a:r>
+              <a:rPr lang="ja-JP" altLang="en-US" sz="2800" b="1" dirty="0">
+                <a:latin typeface="HGS創英角ﾎﾟｯﾌﾟ体" panose="040B0A00000000000000" pitchFamily="82" charset="-128"/>
+                <a:ea typeface="HGS創英角ﾎﾟｯﾌﾟ体" panose="040B0A00000000000000" pitchFamily="82" charset="-128"/>
+              </a:rPr>
+              <a:t>苦労</a:t>
+            </a:r>
+            <a:r>
+              <a:rPr kumimoji="1" lang="ja-JP" altLang="en-US" sz="2800" b="1" dirty="0">
+                <a:latin typeface="HGS創英角ﾎﾟｯﾌﾟ体" panose="040B0A00000000000000" pitchFamily="82" charset="-128"/>
+                <a:ea typeface="HGS創英角ﾎﾟｯﾌﾟ体" panose="040B0A00000000000000" pitchFamily="82" charset="-128"/>
+              </a:rPr>
+              <a:t>した点</a:t>
+            </a:r>
+          </a:p>
+        </p:txBody>
+      </p:sp>
+      <p:sp>
+        <p:nvSpPr>
+          <p:cNvPr id="34" name="テキスト ボックス 33">
+            <a:extLst>
+              <a:ext uri="{FF2B5EF4-FFF2-40B4-BE49-F238E27FC236}">
+                <a16:creationId xmlns:a16="http://schemas.microsoft.com/office/drawing/2014/main" id="{59C7A809-58E7-4415-E63E-DC59F4DD4029}"/>
+              </a:ext>
+            </a:extLst>
+          </p:cNvPr>
+          <p:cNvSpPr txBox="1"/>
+          <p:nvPr/>
+        </p:nvSpPr>
+        <p:spPr>
+          <a:xfrm>
+            <a:off x="4037086" y="3240447"/>
+            <a:ext cx="7133762" cy="400110"/>
+          </a:xfrm>
+          <a:prstGeom prst="rect">
+            <a:avLst/>
+          </a:prstGeom>
+          <a:noFill/>
+        </p:spPr>
+        <p:txBody>
+          <a:bodyPr wrap="square" rtlCol="0">
+            <a:spAutoFit/>
+          </a:bodyPr>
+          <a:lstStyle/>
+          <a:p>
+            <a:r>
+              <a:rPr kumimoji="1" lang="ja-JP" altLang="en-US" sz="2000" b="1" dirty="0"/>
+              <a:t>・自分で気付けなかったバグを修正するのが大変だった</a:t>
+            </a:r>
+            <a:endParaRPr kumimoji="1" lang="en-US" altLang="ja-JP" sz="2000" b="1" dirty="0"/>
+          </a:p>
+        </p:txBody>
+      </p:sp>
+      <p:sp>
+        <p:nvSpPr>
+          <p:cNvPr id="35" name="テキスト ボックス 34">
+            <a:extLst>
+              <a:ext uri="{FF2B5EF4-FFF2-40B4-BE49-F238E27FC236}">
+                <a16:creationId xmlns:a16="http://schemas.microsoft.com/office/drawing/2014/main" id="{168DFFE2-5A5D-90A0-B5E2-20F7F43CF632}"/>
+              </a:ext>
+            </a:extLst>
+          </p:cNvPr>
+          <p:cNvSpPr txBox="1"/>
+          <p:nvPr/>
+        </p:nvSpPr>
+        <p:spPr>
+          <a:xfrm>
+            <a:off x="4037086" y="3695038"/>
+            <a:ext cx="8546800" cy="400110"/>
+          </a:xfrm>
+          <a:prstGeom prst="rect">
+            <a:avLst/>
+          </a:prstGeom>
+          <a:noFill/>
+        </p:spPr>
+        <p:txBody>
+          <a:bodyPr wrap="square" rtlCol="0">
+            <a:spAutoFit/>
+          </a:bodyPr>
+          <a:lstStyle/>
+          <a:p>
+            <a:r>
+              <a:rPr kumimoji="1" lang="ja-JP" altLang="en-US" sz="2000" b="1" dirty="0"/>
+              <a:t>・パワーアップアイテムの取得判定を取り入れるのに時間がかかった</a:t>
+            </a:r>
+          </a:p>
+        </p:txBody>
+      </p:sp>
+    </p:spTree>
+    <p:extLst>
+      <p:ext uri="{BB962C8B-B14F-4D97-AF65-F5344CB8AC3E}">
+        <p14:creationId xmlns:p14="http://schemas.microsoft.com/office/powerpoint/2010/main" val="4213410645"/>
+      </p:ext>
+    </p:extLst>
+  </p:cSld>
+  <p:clrMapOvr>
+    <a:masterClrMapping/>
+  </p:clrMapOvr>
+</p:sld>
+</file>
+
+<file path=ppt/slides/slide5.xml><?xml version="1.0" encoding="utf-8"?>
+<p:sld xmlns:a="http://schemas.openxmlformats.org/drawingml/2006/main" xmlns:r="http://schemas.openxmlformats.org/officeDocument/2006/relationships" xmlns:p="http://schemas.openxmlformats.org/presentationml/2006/main">
+  <p:cSld>
+    <p:spTree>
+      <p:nvGrpSpPr>
+        <p:cNvPr id="1" name="">
+          <a:extLst>
+            <a:ext uri="{FF2B5EF4-FFF2-40B4-BE49-F238E27FC236}">
+              <a16:creationId xmlns:a16="http://schemas.microsoft.com/office/drawing/2014/main" id="{75FF2271-781A-6BC2-3016-C3F5DC894412}"/>
+            </a:ext>
+          </a:extLst>
+        </p:cNvPr>
+        <p:cNvGrpSpPr/>
+        <p:nvPr/>
+      </p:nvGrpSpPr>
+      <p:grpSpPr>
+        <a:xfrm>
+          <a:off x="0" y="0"/>
+          <a:ext cx="0" cy="0"/>
+          <a:chOff x="0" y="0"/>
+          <a:chExt cx="0" cy="0"/>
+        </a:xfrm>
+      </p:grpSpPr>
+      <p:pic>
+        <p:nvPicPr>
+          <p:cNvPr id="3" name="図 2" descr="グラフ, ヒストグラム&#10;&#10;AI 生成コンテンツは誤りを含む可能性があります。">
+            <a:extLst>
+              <a:ext uri="{FF2B5EF4-FFF2-40B4-BE49-F238E27FC236}">
+                <a16:creationId xmlns:a16="http://schemas.microsoft.com/office/drawing/2014/main" id="{D9D58DEF-FD2C-1A97-000E-ACD29FA2D887}"/>
+              </a:ext>
+            </a:extLst>
+          </p:cNvPr>
+          <p:cNvPicPr>
+            <a:picLocks noChangeAspect="1"/>
+          </p:cNvPicPr>
+          <p:nvPr/>
+        </p:nvPicPr>
+        <p:blipFill>
+          <a:blip r:embed="rId2">
+            <a:extLst>
+              <a:ext uri="{28A0092B-C50C-407E-A947-70E740481C1C}">
+                <a14:useLocalDpi xmlns:a14="http://schemas.microsoft.com/office/drawing/2010/main" val="0"/>
+              </a:ext>
+            </a:extLst>
+          </a:blip>
+          <a:stretch>
+            <a:fillRect/>
+          </a:stretch>
+        </p:blipFill>
+        <p:spPr>
+          <a:xfrm>
+            <a:off x="796" y="-1"/>
+            <a:ext cx="12191204" cy="6858001"/>
+          </a:xfrm>
+          <a:prstGeom prst="rect">
+            <a:avLst/>
+          </a:prstGeom>
+        </p:spPr>
+      </p:pic>
+      <p:sp>
+        <p:nvSpPr>
+          <p:cNvPr id="4" name="雲 3">
+            <a:extLst>
+              <a:ext uri="{FF2B5EF4-FFF2-40B4-BE49-F238E27FC236}">
+                <a16:creationId xmlns:a16="http://schemas.microsoft.com/office/drawing/2014/main" id="{9D2E434F-7002-F4C5-DADF-DB124DEF8016}"/>
+              </a:ext>
+            </a:extLst>
+          </p:cNvPr>
+          <p:cNvSpPr/>
+          <p:nvPr/>
+        </p:nvSpPr>
+        <p:spPr>
+          <a:xfrm>
+            <a:off x="398916" y="210848"/>
+            <a:ext cx="2274616" cy="1374726"/>
+          </a:xfrm>
+          <a:prstGeom prst="cloud">
+            <a:avLst/>
+          </a:prstGeom>
+          <a:solidFill>
+            <a:schemeClr val="bg1"/>
+          </a:solidFill>
+          <a:ln>
+            <a:solidFill>
+              <a:schemeClr val="tx1"/>
+            </a:solidFill>
+          </a:ln>
+        </p:spPr>
+        <p:style>
+          <a:lnRef idx="2">
+            <a:schemeClr val="accent1">
+              <a:shade val="15000"/>
+            </a:schemeClr>
+          </a:lnRef>
+          <a:fillRef idx="1">
+            <a:schemeClr val="accent1"/>
+          </a:fillRef>
+          <a:effectRef idx="0">
+            <a:schemeClr val="accent1"/>
+          </a:effectRef>
+          <a:fontRef idx="minor">
+            <a:schemeClr val="lt1"/>
+          </a:fontRef>
+        </p:style>
+        <p:txBody>
+          <a:bodyPr rtlCol="0" anchor="ctr"/>
+          <a:lstStyle/>
+          <a:p>
+            <a:pPr algn="ctr"/>
+            <a:endParaRPr kumimoji="1" lang="ja-JP" altLang="en-US" dirty="0"/>
+          </a:p>
+        </p:txBody>
+      </p:sp>
+      <p:sp>
+        <p:nvSpPr>
+          <p:cNvPr id="2" name="正方形/長方形 1">
+            <a:extLst>
+              <a:ext uri="{FF2B5EF4-FFF2-40B4-BE49-F238E27FC236}">
+                <a16:creationId xmlns:a16="http://schemas.microsoft.com/office/drawing/2014/main" id="{DA60E6B4-0BA3-E28F-4A8D-86EDCA630BEC}"/>
+              </a:ext>
+            </a:extLst>
+          </p:cNvPr>
+          <p:cNvSpPr/>
+          <p:nvPr/>
+        </p:nvSpPr>
+        <p:spPr>
+          <a:xfrm>
+            <a:off x="4772297" y="3962400"/>
+            <a:ext cx="2508069" cy="2098766"/>
+          </a:xfrm>
+          <a:prstGeom prst="rect">
+            <a:avLst/>
+          </a:prstGeom>
+          <a:solidFill>
+            <a:schemeClr val="accent1">
+              <a:lumMod val="40000"/>
+              <a:lumOff val="60000"/>
+            </a:schemeClr>
+          </a:solidFill>
+          <a:ln>
+            <a:solidFill>
+              <a:schemeClr val="accent1">
+                <a:lumMod val="40000"/>
+                <a:lumOff val="60000"/>
+              </a:schemeClr>
+            </a:solidFill>
+          </a:ln>
+        </p:spPr>
+        <p:style>
+          <a:lnRef idx="2">
+            <a:schemeClr val="accent1">
+              <a:shade val="15000"/>
+            </a:schemeClr>
+          </a:lnRef>
+          <a:fillRef idx="1">
+            <a:schemeClr val="accent1"/>
+          </a:fillRef>
+          <a:effectRef idx="0">
+            <a:schemeClr val="accent1"/>
+          </a:effectRef>
+          <a:fontRef idx="minor">
+            <a:schemeClr val="lt1"/>
+          </a:fontRef>
+        </p:style>
+        <p:txBody>
+          <a:bodyPr rtlCol="0" anchor="ctr"/>
+          <a:lstStyle/>
+          <a:p>
+            <a:pPr algn="ctr"/>
+            <a:endParaRPr kumimoji="1" lang="ja-JP" altLang="en-US"/>
+          </a:p>
+        </p:txBody>
+      </p:sp>
+      <p:sp>
+        <p:nvSpPr>
+          <p:cNvPr id="6" name="テキスト ボックス 5">
+            <a:extLst>
+              <a:ext uri="{FF2B5EF4-FFF2-40B4-BE49-F238E27FC236}">
+                <a16:creationId xmlns:a16="http://schemas.microsoft.com/office/drawing/2014/main" id="{9D1FB50D-F802-6080-072A-1445FE0477DD}"/>
+              </a:ext>
+            </a:extLst>
+          </p:cNvPr>
+          <p:cNvSpPr txBox="1"/>
+          <p:nvPr/>
+        </p:nvSpPr>
+        <p:spPr>
+          <a:xfrm>
+            <a:off x="3944982" y="3025446"/>
+            <a:ext cx="4894217" cy="584775"/>
+          </a:xfrm>
+          <a:prstGeom prst="rect">
+            <a:avLst/>
+          </a:prstGeom>
+          <a:noFill/>
+        </p:spPr>
+        <p:txBody>
+          <a:bodyPr wrap="square" rtlCol="0">
+            <a:spAutoFit/>
+          </a:bodyPr>
+          <a:lstStyle/>
+          <a:p>
+            <a:r>
+              <a:rPr kumimoji="1" lang="en-US" altLang="ja-JP" sz="3200" b="1" dirty="0">
+                <a:solidFill>
+                  <a:srgbClr val="FF0000"/>
+                </a:solidFill>
+                <a:latin typeface="HGP創英角ﾎﾟｯﾌﾟ体" panose="040B0A00000000000000" pitchFamily="82" charset="-128"/>
+                <a:ea typeface="HGP創英角ﾎﾟｯﾌﾟ体" panose="040B0A00000000000000" pitchFamily="82" charset="-128"/>
+              </a:rPr>
+              <a:t>CONGRATULATIONS</a:t>
+            </a:r>
+            <a:r>
+              <a:rPr kumimoji="1" lang="ja-JP" altLang="en-US" sz="3200" b="1" dirty="0">
+                <a:solidFill>
+                  <a:srgbClr val="FF0000"/>
+                </a:solidFill>
+                <a:latin typeface="HGP創英角ﾎﾟｯﾌﾟ体" panose="040B0A00000000000000" pitchFamily="82" charset="-128"/>
+                <a:ea typeface="HGP創英角ﾎﾟｯﾌﾟ体" panose="040B0A00000000000000" pitchFamily="82" charset="-128"/>
+              </a:rPr>
+              <a:t>！！</a:t>
+            </a:r>
+          </a:p>
+        </p:txBody>
+      </p:sp>
+      <p:sp>
+        <p:nvSpPr>
+          <p:cNvPr id="7" name="テキスト ボックス 6">
+            <a:extLst>
+              <a:ext uri="{FF2B5EF4-FFF2-40B4-BE49-F238E27FC236}">
+                <a16:creationId xmlns:a16="http://schemas.microsoft.com/office/drawing/2014/main" id="{B9A00816-8B30-025B-EE0C-EC1DC35DD390}"/>
+              </a:ext>
+            </a:extLst>
+          </p:cNvPr>
+          <p:cNvSpPr txBox="1"/>
+          <p:nvPr/>
+        </p:nvSpPr>
+        <p:spPr>
+          <a:xfrm>
+            <a:off x="2238103" y="2018359"/>
+            <a:ext cx="7865518" cy="830997"/>
+          </a:xfrm>
+          <a:prstGeom prst="rect">
+            <a:avLst/>
+          </a:prstGeom>
+          <a:noFill/>
+        </p:spPr>
+        <p:txBody>
+          <a:bodyPr wrap="square" rtlCol="0">
+            <a:spAutoFit/>
+          </a:bodyPr>
+          <a:lstStyle/>
+          <a:p>
+            <a:r>
+              <a:rPr lang="ja-JP" altLang="en-US" sz="4800" dirty="0">
+                <a:latin typeface="HGP創英角ｺﾞｼｯｸUB" panose="020B0900000000000000" pitchFamily="34" charset="-128"/>
+                <a:ea typeface="HGP創英角ｺﾞｼｯｸUB" panose="020B0900000000000000" pitchFamily="34" charset="-128"/>
+              </a:rPr>
+              <a:t>ご清聴ありがとうございました</a:t>
+            </a:r>
+            <a:endParaRPr kumimoji="1" lang="ja-JP" altLang="en-US" sz="4800" dirty="0">
+              <a:latin typeface="HGP創英角ｺﾞｼｯｸUB" panose="020B0900000000000000" pitchFamily="34" charset="-128"/>
+              <a:ea typeface="HGP創英角ｺﾞｼｯｸUB" panose="020B0900000000000000" pitchFamily="34" charset="-128"/>
+            </a:endParaRPr>
+          </a:p>
+        </p:txBody>
+      </p:sp>
+      <p:sp>
+        <p:nvSpPr>
+          <p:cNvPr id="17" name="テキスト ボックス 16">
+            <a:extLst>
+              <a:ext uri="{FF2B5EF4-FFF2-40B4-BE49-F238E27FC236}">
+                <a16:creationId xmlns:a16="http://schemas.microsoft.com/office/drawing/2014/main" id="{7B4D1D03-85BC-B6F9-6D5A-D76119A460AA}"/>
+              </a:ext>
+            </a:extLst>
+          </p:cNvPr>
+          <p:cNvSpPr txBox="1"/>
+          <p:nvPr/>
+        </p:nvSpPr>
+        <p:spPr>
+          <a:xfrm>
+            <a:off x="766354" y="667378"/>
+            <a:ext cx="2002971" cy="461665"/>
+          </a:xfrm>
+          <a:prstGeom prst="rect">
+            <a:avLst/>
+          </a:prstGeom>
+          <a:noFill/>
+        </p:spPr>
+        <p:txBody>
+          <a:bodyPr wrap="square" rtlCol="0">
+            <a:spAutoFit/>
+          </a:bodyPr>
+          <a:lstStyle/>
+          <a:p>
+            <a:r>
+              <a:rPr kumimoji="1" lang="en-US" altLang="ja-JP" sz="2400" b="1" dirty="0">
+                <a:latin typeface="HGS行書体" panose="03000600000000000000" pitchFamily="66" charset="-128"/>
+                <a:ea typeface="HGS行書体" panose="03000600000000000000" pitchFamily="66" charset="-128"/>
+              </a:rPr>
+              <a:t>Thankyou</a:t>
+            </a:r>
+            <a:endParaRPr kumimoji="1" lang="ja-JP" altLang="en-US" sz="2400" b="1" dirty="0">
+              <a:latin typeface="HGS行書体" panose="03000600000000000000" pitchFamily="66" charset="-128"/>
+              <a:ea typeface="HGS行書体" panose="03000600000000000000" pitchFamily="66" charset="-128"/>
+            </a:endParaRPr>
+          </a:p>
+        </p:txBody>
+      </p:sp>
+    </p:spTree>
+    <p:extLst>
+      <p:ext uri="{BB962C8B-B14F-4D97-AF65-F5344CB8AC3E}">
+        <p14:creationId xmlns:p14="http://schemas.microsoft.com/office/powerpoint/2010/main" val="88104074"/>
       </p:ext>
     </p:extLst>
   </p:cSld>
